--- a/docs/拾光_Shiguang_项目展示.pptx
+++ b/docs/拾光_Shiguang_项目展示.pptx
@@ -360,7 +360,7 @@
           <a:p>
             <a:fld id="{B7268E1E-0E44-426D-905E-8AD9B19D2182}" type="datetimeFigureOut">
               <a:rPr lang="cs-CZ" smtClean="0"/>
-              <a:t>28.08.2026</a:t>
+              <a:t>29.08.2026</a:t>
             </a:fld>
             <a:endParaRPr lang="cs-CZ"/>
           </a:p>
@@ -1766,8 +1766,8 @@
         </p:nvSpPr>
         <p:spPr>
           <a:xfrm>
-            <a:off x="2857500" y="512763"/>
-            <a:ext cx="3429000" cy="2566987"/>
+            <a:off x="2290763" y="512763"/>
+            <a:ext cx="4562475" cy="2566987"/>
           </a:xfrm>
           <a:prstGeom prst="rect">
             <a:avLst/>
@@ -2549,8 +2549,8 @@
         </p:nvSpPr>
         <p:spPr>
           <a:xfrm>
-            <a:off x="2857500" y="512763"/>
-            <a:ext cx="3429000" cy="2566987"/>
+            <a:off x="2290763" y="512763"/>
+            <a:ext cx="4562475" cy="2566987"/>
           </a:xfrm>
           <a:prstGeom prst="rect">
             <a:avLst/>
@@ -4898,8 +4898,8 @@
         </p:nvSpPr>
         <p:spPr>
           <a:xfrm>
-            <a:off x="2857500" y="512763"/>
-            <a:ext cx="3429000" cy="2566987"/>
+            <a:off x="2290763" y="512763"/>
+            <a:ext cx="4562475" cy="2566987"/>
           </a:xfrm>
           <a:prstGeom prst="rect">
             <a:avLst/>
@@ -16502,7 +16502,7 @@
               <a:defRPr/>
             </a:pPr>
             <a:r>
-              <a:rPr lang="en-US" sz="9200" b="1" i="0" u="none" strike="noStrike">
+              <a:rPr lang="en-US" sz="9200" b="1" i="0" u="none" strike="noStrike" dirty="0" err="1">
                 <a:solidFill>
                   <a:srgbClr val="F2EAD8"/>
                 </a:solidFill>
@@ -16513,7 +16513,7 @@
               </a:rPr>
               <a:t>拾光</a:t>
             </a:r>
-            <a:endParaRPr lang="en-US" sz="1100"/>
+            <a:endParaRPr lang="en-US" sz="1100" dirty="0"/>
           </a:p>
         </p:txBody>
       </p:sp>
@@ -18646,7 +18646,7 @@
               <a:defRPr/>
             </a:pPr>
             <a:r>
-              <a:rPr lang="en-US" sz="3000" b="1" i="0" u="none" strike="noStrike">
+              <a:rPr lang="en-US" sz="3000" b="1" i="0" u="none" strike="noStrike" dirty="0" err="1">
                 <a:solidFill>
                   <a:srgbClr val="F2EAD8"/>
                 </a:solidFill>
@@ -18655,9 +18655,33 @@
                 <a:cs typeface="Noto Sans SC"/>
                 <a:sym typeface="Noto Sans SC"/>
               </a:rPr>
-              <a:t>产品实拍 · 日历视图</a:t>
+              <a:t>产品实拍</a:t>
             </a:r>
-            <a:endParaRPr lang="en-US" sz="1100"/>
+            <a:r>
+              <a:rPr lang="en-US" sz="3000" b="1" i="0" u="none" strike="noStrike" dirty="0">
+                <a:solidFill>
+                  <a:srgbClr val="F2EAD8"/>
+                </a:solidFill>
+                <a:latin typeface="Noto Sans SC"/>
+                <a:ea typeface="Noto Sans SC"/>
+                <a:cs typeface="Noto Sans SC"/>
+                <a:sym typeface="Noto Sans SC"/>
+              </a:rPr>
+              <a:t> · </a:t>
+            </a:r>
+            <a:r>
+              <a:rPr lang="en-US" sz="3000" b="1" i="0" u="none" strike="noStrike" dirty="0" err="1">
+                <a:solidFill>
+                  <a:srgbClr val="F2EAD8"/>
+                </a:solidFill>
+                <a:latin typeface="Noto Sans SC"/>
+                <a:ea typeface="Noto Sans SC"/>
+                <a:cs typeface="Noto Sans SC"/>
+                <a:sym typeface="Noto Sans SC"/>
+              </a:rPr>
+              <a:t>日历视图</a:t>
+            </a:r>
+            <a:endParaRPr lang="en-US" sz="1100" dirty="0"/>
           </a:p>
         </p:txBody>
       </p:sp>
@@ -18787,7 +18811,7 @@
               <a:defRPr/>
             </a:pPr>
             <a:r>
-              <a:rPr lang="en-US" sz="1200" b="0" i="0" u="none" strike="noStrike">
+              <a:rPr lang="en-US" sz="1200" b="0" i="0" u="none" strike="noStrike" dirty="0" err="1">
                 <a:solidFill>
                   <a:srgbClr val="BAC1CF"/>
                 </a:solidFill>
@@ -18796,9 +18820,45 @@
                 <a:cs typeface="Noto Sans SC"/>
                 <a:sym typeface="Noto Sans SC"/>
               </a:rPr>
-              <a:t>浅色主题 · 日历视图 · 2026 年 8 月</a:t>
+              <a:t>浅色主题</a:t>
             </a:r>
-            <a:endParaRPr lang="en-US" sz="1100"/>
+            <a:r>
+              <a:rPr lang="en-US" sz="1200" b="0" i="0" u="none" strike="noStrike" dirty="0">
+                <a:solidFill>
+                  <a:srgbClr val="BAC1CF"/>
+                </a:solidFill>
+                <a:latin typeface="Noto Sans SC"/>
+                <a:ea typeface="Noto Sans SC"/>
+                <a:cs typeface="Noto Sans SC"/>
+                <a:sym typeface="Noto Sans SC"/>
+              </a:rPr>
+              <a:t> · </a:t>
+            </a:r>
+            <a:r>
+              <a:rPr lang="en-US" sz="1200" b="0" i="0" u="none" strike="noStrike" dirty="0" err="1">
+                <a:solidFill>
+                  <a:srgbClr val="BAC1CF"/>
+                </a:solidFill>
+                <a:latin typeface="Noto Sans SC"/>
+                <a:ea typeface="Noto Sans SC"/>
+                <a:cs typeface="Noto Sans SC"/>
+                <a:sym typeface="Noto Sans SC"/>
+              </a:rPr>
+              <a:t>日历视图</a:t>
+            </a:r>
+            <a:r>
+              <a:rPr lang="en-US" sz="1200" b="0" i="0" u="none" strike="noStrike" dirty="0">
+                <a:solidFill>
+                  <a:srgbClr val="BAC1CF"/>
+                </a:solidFill>
+                <a:latin typeface="Noto Sans SC"/>
+                <a:ea typeface="Noto Sans SC"/>
+                <a:cs typeface="Noto Sans SC"/>
+                <a:sym typeface="Noto Sans SC"/>
+              </a:rPr>
+              <a:t> </a:t>
+            </a:r>
+            <a:endParaRPr lang="en-US" sz="1100" dirty="0"/>
           </a:p>
         </p:txBody>
       </p:sp>
@@ -22227,7 +22287,7 @@
               <a:defRPr/>
             </a:pPr>
             <a:r>
-              <a:rPr lang="en-US" sz="1100" b="0" i="0" u="none" strike="noStrike">
+              <a:rPr lang="en-US" sz="1100" b="0" i="0" u="none" strike="noStrike" dirty="0" err="1">
                 <a:solidFill>
                   <a:srgbClr val="8A93A6"/>
                 </a:solidFill>
@@ -22236,9 +22296,45 @@
                 <a:cs typeface="Noto Sans SC"/>
                 <a:sym typeface="Noto Sans SC"/>
               </a:rPr>
-              <a:t>完整排障过程记录在 docs/devlog/，作为评审材料</a:t>
+              <a:t>完整排障过程记录在</a:t>
             </a:r>
-            <a:endParaRPr lang="en-US" sz="1100"/>
+            <a:r>
+              <a:rPr lang="en-US" sz="1100" b="0" i="0" u="none" strike="noStrike" dirty="0">
+                <a:solidFill>
+                  <a:srgbClr val="8A93A6"/>
+                </a:solidFill>
+                <a:latin typeface="Noto Sans SC"/>
+                <a:ea typeface="Noto Sans SC"/>
+                <a:cs typeface="Noto Sans SC"/>
+                <a:sym typeface="Noto Sans SC"/>
+              </a:rPr>
+              <a:t> docs/</a:t>
+            </a:r>
+            <a:r>
+              <a:rPr lang="en-US" sz="1100" b="0" i="0" u="none" strike="noStrike" dirty="0" err="1">
+                <a:solidFill>
+                  <a:srgbClr val="8A93A6"/>
+                </a:solidFill>
+                <a:latin typeface="Noto Sans SC"/>
+                <a:ea typeface="Noto Sans SC"/>
+                <a:cs typeface="Noto Sans SC"/>
+                <a:sym typeface="Noto Sans SC"/>
+              </a:rPr>
+              <a:t>devlog</a:t>
+            </a:r>
+            <a:r>
+              <a:rPr lang="en-US" sz="1100" b="0" i="0" u="none" strike="noStrike" dirty="0">
+                <a:solidFill>
+                  <a:srgbClr val="8A93A6"/>
+                </a:solidFill>
+                <a:latin typeface="Noto Sans SC"/>
+                <a:ea typeface="Noto Sans SC"/>
+                <a:cs typeface="Noto Sans SC"/>
+                <a:sym typeface="Noto Sans SC"/>
+              </a:rPr>
+              <a:t>/</a:t>
+            </a:r>
+            <a:endParaRPr lang="en-US" sz="1100" dirty="0"/>
           </a:p>
         </p:txBody>
       </p:sp>
@@ -24051,7 +24147,7 @@
               <a:defRPr/>
             </a:pPr>
             <a:r>
-              <a:rPr lang="en-US" sz="1200" b="0" i="0" u="none" strike="noStrike">
+              <a:rPr lang="en-US" sz="1200" b="0" i="0" u="none" strike="noStrike" dirty="0" err="1">
                 <a:solidFill>
                   <a:srgbClr val="A2AABA"/>
                 </a:solidFill>
@@ -24060,9 +24156,33 @@
                 <a:cs typeface="Noto Sans SC"/>
                 <a:sym typeface="Noto Sans SC"/>
               </a:rPr>
-              <a:t>学习方法、考研保研、竞赛通知……混在一处</a:t>
+              <a:t>学习方法、考研保研、竞赛通知</a:t>
             </a:r>
-            <a:endParaRPr lang="en-US" sz="1100"/>
+            <a:r>
+              <a:rPr lang="en-US" sz="1200" b="0" i="0" u="none" strike="noStrike" dirty="0">
+                <a:solidFill>
+                  <a:srgbClr val="A2AABA"/>
+                </a:solidFill>
+                <a:latin typeface="Noto Sans SC"/>
+                <a:ea typeface="Noto Sans SC"/>
+                <a:cs typeface="Noto Sans SC"/>
+                <a:sym typeface="Noto Sans SC"/>
+              </a:rPr>
+              <a:t>……</a:t>
+            </a:r>
+            <a:r>
+              <a:rPr lang="en-US" sz="1200" b="0" i="0" u="none" strike="noStrike" dirty="0" err="1">
+                <a:solidFill>
+                  <a:srgbClr val="A2AABA"/>
+                </a:solidFill>
+                <a:latin typeface="Noto Sans SC"/>
+                <a:ea typeface="Noto Sans SC"/>
+                <a:cs typeface="Noto Sans SC"/>
+                <a:sym typeface="Noto Sans SC"/>
+              </a:rPr>
+              <a:t>混在一处</a:t>
+            </a:r>
+            <a:endParaRPr lang="en-US" sz="1100" dirty="0"/>
           </a:p>
         </p:txBody>
       </p:sp>
@@ -28946,6 +29066,45 @@
           </a:p>
         </p:txBody>
       </p:sp>
+      <p:cxnSp>
+        <p:nvCxnSpPr>
+          <p:cNvPr id="20" name="直接箭头连接符 19">
+            <a:extLst>
+              <a:ext uri="{FF2B5EF4-FFF2-40B4-BE49-F238E27FC236}">
+                <a16:creationId xmlns:a16="http://schemas.microsoft.com/office/drawing/2014/main" id="{E1243BAD-9007-59D9-838A-476DC72612C8}"/>
+              </a:ext>
+            </a:extLst>
+          </p:cNvPr>
+          <p:cNvCxnSpPr/>
+          <p:nvPr/>
+        </p:nvCxnSpPr>
+        <p:spPr>
+          <a:xfrm>
+            <a:off x="6797615" y="2076091"/>
+            <a:ext cx="954657" cy="954656"/>
+          </a:xfrm>
+          <a:prstGeom prst="straightConnector1">
+            <a:avLst/>
+          </a:prstGeom>
+          <a:ln>
+            <a:tailEnd type="triangle"/>
+          </a:ln>
+        </p:spPr>
+        <p:style>
+          <a:lnRef idx="3">
+            <a:schemeClr val="accent5"/>
+          </a:lnRef>
+          <a:fillRef idx="0">
+            <a:schemeClr val="accent5"/>
+          </a:fillRef>
+          <a:effectRef idx="2">
+            <a:schemeClr val="accent5"/>
+          </a:effectRef>
+          <a:fontRef idx="minor">
+            <a:schemeClr val="tx1"/>
+          </a:fontRef>
+        </p:style>
+      </p:cxnSp>
     </p:spTree>
   </p:cSld>
   <p:clrMapOvr>
